--- a/slides for class/my slides/Overview of JavaScript.pptx
+++ b/slides for class/my slides/Overview of JavaScript.pptx
@@ -12,15 +12,16 @@
     <p:sldId id="260" r:id="rId6"/>
     <p:sldId id="261" r:id="rId7"/>
     <p:sldId id="262" r:id="rId8"/>
-    <p:sldId id="263" r:id="rId9"/>
-    <p:sldId id="264" r:id="rId10"/>
-    <p:sldId id="265" r:id="rId11"/>
-    <p:sldId id="266" r:id="rId12"/>
-    <p:sldId id="267" r:id="rId13"/>
-    <p:sldId id="268" r:id="rId14"/>
-    <p:sldId id="269" r:id="rId15"/>
-    <p:sldId id="270" r:id="rId16"/>
-    <p:sldId id="272" r:id="rId17"/>
+    <p:sldId id="273" r:id="rId9"/>
+    <p:sldId id="263" r:id="rId10"/>
+    <p:sldId id="264" r:id="rId11"/>
+    <p:sldId id="265" r:id="rId12"/>
+    <p:sldId id="266" r:id="rId13"/>
+    <p:sldId id="267" r:id="rId14"/>
+    <p:sldId id="268" r:id="rId15"/>
+    <p:sldId id="269" r:id="rId16"/>
+    <p:sldId id="270" r:id="rId17"/>
+    <p:sldId id="272" r:id="rId18"/>
   </p:sldIdLst>
   <p:sldSz cx="12192000" cy="6858000"/>
   <p:notesSz cx="6858000" cy="9144000"/>
@@ -5787,7 +5788,7 @@
           <p:cNvPr id="2" name="Title 1">
             <a:extLst>
               <a:ext uri="{FF2B5EF4-FFF2-40B4-BE49-F238E27FC236}">
-                <a16:creationId xmlns:a16="http://schemas.microsoft.com/office/drawing/2014/main" id="{86B94F84-61BD-5356-1AA8-89028DE777AB}"/>
+                <a16:creationId xmlns:a16="http://schemas.microsoft.com/office/drawing/2014/main" id="{8DE2A64F-B95B-35A9-6FB5-996E77138588}"/>
               </a:ext>
             </a:extLst>
           </p:cNvPr>
@@ -5800,22 +5801,24 @@
         </p:nvSpPr>
         <p:spPr/>
         <p:txBody>
-          <a:bodyPr/>
-          <a:lstStyle/>
-          <a:p>
-            <a:r>
-              <a:rPr lang="en-US" dirty="0"/>
-              <a:t>JavaScript Ecosystem</a:t>
-            </a:r>
-          </a:p>
-        </p:txBody>
-      </p:sp>
-      <p:sp>
-        <p:nvSpPr>
-          <p:cNvPr id="3" name="Content Placeholder 2">
+          <a:bodyPr>
+            <a:normAutofit/>
+          </a:bodyPr>
+          <a:lstStyle/>
+          <a:p>
+            <a:r>
+              <a:rPr lang="en-US" dirty="0"/>
+              <a:t>JavaScript vs. Other Languages</a:t>
+            </a:r>
+          </a:p>
+        </p:txBody>
+      </p:sp>
+      <p:sp>
+        <p:nvSpPr>
+          <p:cNvPr id="7" name="Content Placeholder 6">
             <a:extLst>
               <a:ext uri="{FF2B5EF4-FFF2-40B4-BE49-F238E27FC236}">
-                <a16:creationId xmlns:a16="http://schemas.microsoft.com/office/drawing/2014/main" id="{FB84B189-FC72-576B-E9EA-B4F385E7E3E6}"/>
+                <a16:creationId xmlns:a16="http://schemas.microsoft.com/office/drawing/2014/main" id="{60C2521E-3770-1756-E360-5244B434600E}"/>
               </a:ext>
             </a:extLst>
           </p:cNvPr>
@@ -5833,89 +5836,21 @@
           <a:p>
             <a:r>
               <a:rPr lang="en-US" b="1" dirty="0"/>
-              <a:t>Libraries</a:t>
-            </a:r>
-            <a:r>
-              <a:rPr lang="en-US" dirty="0"/>
-              <a:t>: Collections of pre-written JavaScript code (e.g., </a:t>
-            </a:r>
+              <a:t>Dynamic vs. Static Typing</a:t>
+            </a:r>
+            <a:r>
+              <a:rPr lang="en-US" dirty="0"/>
+              <a:t>: JavaScript is dynamically typed, unlike languages like Java which are statically typed.</a:t>
+            </a:r>
+          </a:p>
+          <a:p>
             <a:r>
               <a:rPr lang="en-US" b="1" dirty="0"/>
-              <a:t>jQuery</a:t>
-            </a:r>
-            <a:r>
-              <a:rPr lang="en-US" dirty="0"/>
-              <a:t>, </a:t>
-            </a:r>
-            <a:r>
-              <a:rPr lang="en-US" b="1" dirty="0"/>
-              <a:t>D3.js</a:t>
-            </a:r>
-            <a:r>
-              <a:rPr lang="en-US" dirty="0"/>
-              <a:t>).</a:t>
-            </a:r>
-          </a:p>
-          <a:p>
-            <a:r>
-              <a:rPr lang="en-US" b="1" dirty="0"/>
-              <a:t>Frameworks</a:t>
-            </a:r>
-            <a:r>
-              <a:rPr lang="en-US" dirty="0"/>
-              <a:t>: Structured, opinionated tools for building applications (e.g., </a:t>
-            </a:r>
-            <a:r>
-              <a:rPr lang="en-US" b="1" dirty="0"/>
-              <a:t>React</a:t>
-            </a:r>
-            <a:r>
-              <a:rPr lang="en-US" dirty="0"/>
-              <a:t>, </a:t>
-            </a:r>
-            <a:r>
-              <a:rPr lang="en-US" b="1" dirty="0" err="1"/>
-              <a:t>Vue.js</a:t>
-            </a:r>
-            <a:r>
-              <a:rPr lang="en-US" dirty="0"/>
-              <a:t>, </a:t>
-            </a:r>
-            <a:r>
-              <a:rPr lang="en-US" b="1" dirty="0"/>
-              <a:t>Angular</a:t>
-            </a:r>
-            <a:r>
-              <a:rPr lang="en-US" dirty="0"/>
-              <a:t>).</a:t>
-            </a:r>
-          </a:p>
-          <a:p>
-            <a:r>
-              <a:rPr lang="en-US" b="1" dirty="0"/>
-              <a:t>Node.js</a:t>
-            </a:r>
-            <a:r>
-              <a:rPr lang="en-US" dirty="0"/>
-              <a:t>: JavaScript runtime for server-side programming.</a:t>
-            </a:r>
-          </a:p>
-          <a:p>
-            <a:r>
-              <a:rPr lang="en-US" b="1" dirty="0"/>
-              <a:t>Package Managers</a:t>
-            </a:r>
-            <a:r>
-              <a:rPr lang="en-US" dirty="0"/>
-              <a:t>: </a:t>
-            </a:r>
-            <a:r>
-              <a:rPr lang="en-US" b="1" dirty="0" err="1"/>
-              <a:t>npm</a:t>
-            </a:r>
-            <a:r>
-              <a:rPr lang="en-US" dirty="0"/>
-              <a:t> (Node Package Manager) for managing JavaScript libraries.</a:t>
+              <a:t>Interpreted vs. Compiled</a:t>
+            </a:r>
+            <a:r>
+              <a:rPr lang="en-US" dirty="0"/>
+              <a:t>: JavaScript is interpreted, whereas languages like C++ are compiled.</a:t>
             </a:r>
           </a:p>
         </p:txBody>
@@ -5923,7 +5858,7 @@
     </p:spTree>
     <p:extLst>
       <p:ext uri="{BB962C8B-B14F-4D97-AF65-F5344CB8AC3E}">
-        <p14:creationId xmlns:p14="http://schemas.microsoft.com/office/powerpoint/2010/main" val="3233196986"/>
+        <p14:creationId xmlns:p14="http://schemas.microsoft.com/office/powerpoint/2010/main" val="3067465073"/>
       </p:ext>
     </p:extLst>
   </p:cSld>
@@ -5955,7 +5890,7 @@
           <p:cNvPr id="2" name="Title 1">
             <a:extLst>
               <a:ext uri="{FF2B5EF4-FFF2-40B4-BE49-F238E27FC236}">
-                <a16:creationId xmlns:a16="http://schemas.microsoft.com/office/drawing/2014/main" id="{AA872527-D2FB-4470-D13F-D73195B0F42F}"/>
+                <a16:creationId xmlns:a16="http://schemas.microsoft.com/office/drawing/2014/main" id="{86B94F84-61BD-5356-1AA8-89028DE777AB}"/>
               </a:ext>
             </a:extLst>
           </p:cNvPr>
@@ -5973,7 +5908,7 @@
           <a:p>
             <a:r>
               <a:rPr lang="en-US" dirty="0"/>
-              <a:t>The Role of JavaScript in the Full Stack</a:t>
+              <a:t>JavaScript Ecosystem</a:t>
             </a:r>
           </a:p>
         </p:txBody>
@@ -5983,7 +5918,7 @@
           <p:cNvPr id="3" name="Content Placeholder 2">
             <a:extLst>
               <a:ext uri="{FF2B5EF4-FFF2-40B4-BE49-F238E27FC236}">
-                <a16:creationId xmlns:a16="http://schemas.microsoft.com/office/drawing/2014/main" id="{1186D3C4-9F98-01C7-FC95-D96B8556B0D5}"/>
+                <a16:creationId xmlns:a16="http://schemas.microsoft.com/office/drawing/2014/main" id="{FB84B189-FC72-576B-E9EA-B4F385E7E3E6}"/>
               </a:ext>
             </a:extLst>
           </p:cNvPr>
@@ -6000,26 +5935,38 @@
           <a:lstStyle/>
           <a:p>
             <a:r>
-              <a:rPr lang="en-US" dirty="0"/>
-              <a:t>JavaScript is used in the </a:t>
-            </a:r>
-            <a:r>
               <a:rPr lang="en-US" b="1" dirty="0"/>
-              <a:t>full-stack development</a:t>
-            </a:r>
-            <a:r>
-              <a:rPr lang="en-US" dirty="0"/>
-              <a:t> (Front-End + Back-End).</a:t>
-            </a:r>
-          </a:p>
-          <a:p>
+              <a:t>Libraries</a:t>
+            </a:r>
+            <a:r>
+              <a:rPr lang="en-US" dirty="0"/>
+              <a:t>: Collections of pre-written JavaScript code (e.g., </a:t>
+            </a:r>
             <a:r>
               <a:rPr lang="en-US" b="1" dirty="0"/>
-              <a:t>Front-End</a:t>
-            </a:r>
-            <a:r>
-              <a:rPr lang="en-US" dirty="0"/>
-              <a:t>: Libraries and frameworks like </a:t>
+              <a:t>jQuery</a:t>
+            </a:r>
+            <a:r>
+              <a:rPr lang="en-US" dirty="0"/>
+              <a:t>, </a:t>
+            </a:r>
+            <a:r>
+              <a:rPr lang="en-US" b="1" dirty="0"/>
+              <a:t>D3.js</a:t>
+            </a:r>
+            <a:r>
+              <a:rPr lang="en-US" dirty="0"/>
+              <a:t>).</a:t>
+            </a:r>
+          </a:p>
+          <a:p>
+            <a:r>
+              <a:rPr lang="en-US" b="1" dirty="0"/>
+              <a:t>Frameworks</a:t>
+            </a:r>
+            <a:r>
+              <a:rPr lang="en-US" dirty="0"/>
+              <a:t>: Structured, opinionated tools for building applications (e.g., </a:t>
             </a:r>
             <a:r>
               <a:rPr lang="en-US" b="1" dirty="0"/>
@@ -6027,7 +5974,7 @@
             </a:r>
             <a:r>
               <a:rPr lang="en-US" dirty="0"/>
-              <a:t> or </a:t>
+              <a:t>, </a:t>
             </a:r>
             <a:r>
               <a:rPr lang="en-US" b="1" dirty="0" err="1"/>
@@ -6035,35 +5982,43 @@
             </a:r>
             <a:r>
               <a:rPr lang="en-US" dirty="0"/>
-              <a:t> are used to build interactive user interfaces.</a:t>
-            </a:r>
-          </a:p>
-          <a:p>
+              <a:t>, </a:t>
+            </a:r>
             <a:r>
               <a:rPr lang="en-US" b="1" dirty="0"/>
-              <a:t>Back-End</a:t>
-            </a:r>
-            <a:r>
-              <a:rPr lang="en-US" dirty="0"/>
-              <a:t>: </a:t>
-            </a:r>
+              <a:t>Angular</a:t>
+            </a:r>
+            <a:r>
+              <a:rPr lang="en-US" dirty="0"/>
+              <a:t>).</a:t>
+            </a:r>
+          </a:p>
+          <a:p>
             <a:r>
               <a:rPr lang="en-US" b="1" dirty="0"/>
               <a:t>Node.js</a:t>
             </a:r>
             <a:r>
               <a:rPr lang="en-US" dirty="0"/>
-              <a:t> is used for server-side development, enabling JavaScript to handle database requests, authentication, and more.</a:t>
+              <a:t>: JavaScript runtime for server-side programming.</a:t>
             </a:r>
           </a:p>
           <a:p>
             <a:r>
               <a:rPr lang="en-US" b="1" dirty="0"/>
-              <a:t>Example</a:t>
-            </a:r>
-            <a:r>
-              <a:rPr lang="en-US" dirty="0"/>
-              <a:t>: Using JavaScript to fetch data from a server and display it on a page.</a:t>
+              <a:t>Package Managers</a:t>
+            </a:r>
+            <a:r>
+              <a:rPr lang="en-US" dirty="0"/>
+              <a:t>: </a:t>
+            </a:r>
+            <a:r>
+              <a:rPr lang="en-US" b="1" dirty="0" err="1"/>
+              <a:t>npm</a:t>
+            </a:r>
+            <a:r>
+              <a:rPr lang="en-US" dirty="0"/>
+              <a:t> (Node Package Manager) for managing JavaScript libraries.</a:t>
             </a:r>
           </a:p>
         </p:txBody>
@@ -6071,7 +6026,7 @@
     </p:spTree>
     <p:extLst>
       <p:ext uri="{BB962C8B-B14F-4D97-AF65-F5344CB8AC3E}">
-        <p14:creationId xmlns:p14="http://schemas.microsoft.com/office/powerpoint/2010/main" val="1567381203"/>
+        <p14:creationId xmlns:p14="http://schemas.microsoft.com/office/powerpoint/2010/main" val="3233196986"/>
       </p:ext>
     </p:extLst>
   </p:cSld>
@@ -6103,7 +6058,7 @@
           <p:cNvPr id="2" name="Title 1">
             <a:extLst>
               <a:ext uri="{FF2B5EF4-FFF2-40B4-BE49-F238E27FC236}">
-                <a16:creationId xmlns:a16="http://schemas.microsoft.com/office/drawing/2014/main" id="{AD7F8279-AB35-1639-79D2-EEC66C1FEDE5}"/>
+                <a16:creationId xmlns:a16="http://schemas.microsoft.com/office/drawing/2014/main" id="{AA872527-D2FB-4470-D13F-D73195B0F42F}"/>
               </a:ext>
             </a:extLst>
           </p:cNvPr>
@@ -6121,7 +6076,7 @@
           <a:p>
             <a:r>
               <a:rPr lang="en-US" dirty="0"/>
-              <a:t>JavaScript and Modern Web Applications</a:t>
+              <a:t>The Role of JavaScript in the Full Stack</a:t>
             </a:r>
           </a:p>
         </p:txBody>
@@ -6131,7 +6086,7 @@
           <p:cNvPr id="3" name="Content Placeholder 2">
             <a:extLst>
               <a:ext uri="{FF2B5EF4-FFF2-40B4-BE49-F238E27FC236}">
-                <a16:creationId xmlns:a16="http://schemas.microsoft.com/office/drawing/2014/main" id="{FFF3BEDB-2CFB-962E-56A0-D1DA75BD17C2}"/>
+                <a16:creationId xmlns:a16="http://schemas.microsoft.com/office/drawing/2014/main" id="{1186D3C4-9F98-01C7-FC95-D96B8556B0D5}"/>
               </a:ext>
             </a:extLst>
           </p:cNvPr>
@@ -6148,22 +6103,60 @@
           <a:lstStyle/>
           <a:p>
             <a:r>
+              <a:rPr lang="en-US" dirty="0"/>
+              <a:t>JavaScript is used in the </a:t>
+            </a:r>
+            <a:r>
               <a:rPr lang="en-US" b="1" dirty="0"/>
-              <a:t>Single Page Applications (SPA)</a:t>
-            </a:r>
-            <a:r>
-              <a:rPr lang="en-US" dirty="0"/>
-              <a:t>: JavaScript is heavily used in SPAs, where only part of the page updates, reducing load times.</a:t>
+              <a:t>full-stack development</a:t>
+            </a:r>
+            <a:r>
+              <a:rPr lang="en-US" dirty="0"/>
+              <a:t> (Front-End + Back-End).</a:t>
             </a:r>
           </a:p>
           <a:p>
             <a:r>
               <a:rPr lang="en-US" b="1" dirty="0"/>
-              <a:t>AJAX and Fetch API</a:t>
-            </a:r>
-            <a:r>
-              <a:rPr lang="en-US" dirty="0"/>
-              <a:t>: These allow JavaScript to make asynchronous HTTP requests without reloading the page.</a:t>
+              <a:t>Front-End</a:t>
+            </a:r>
+            <a:r>
+              <a:rPr lang="en-US" dirty="0"/>
+              <a:t>: Libraries and frameworks like </a:t>
+            </a:r>
+            <a:r>
+              <a:rPr lang="en-US" b="1" dirty="0"/>
+              <a:t>React</a:t>
+            </a:r>
+            <a:r>
+              <a:rPr lang="en-US" dirty="0"/>
+              <a:t> or </a:t>
+            </a:r>
+            <a:r>
+              <a:rPr lang="en-US" b="1" dirty="0" err="1"/>
+              <a:t>Vue.js</a:t>
+            </a:r>
+            <a:r>
+              <a:rPr lang="en-US" dirty="0"/>
+              <a:t> are used to build interactive user interfaces.</a:t>
+            </a:r>
+          </a:p>
+          <a:p>
+            <a:r>
+              <a:rPr lang="en-US" b="1" dirty="0"/>
+              <a:t>Back-End</a:t>
+            </a:r>
+            <a:r>
+              <a:rPr lang="en-US" dirty="0"/>
+              <a:t>: </a:t>
+            </a:r>
+            <a:r>
+              <a:rPr lang="en-US" b="1" dirty="0"/>
+              <a:t>Node.js</a:t>
+            </a:r>
+            <a:r>
+              <a:rPr lang="en-US" dirty="0"/>
+              <a:t> is used for server-side development, enabling JavaScript to handle database requests, authentication, and more.</a:t>
             </a:r>
           </a:p>
           <a:p>
@@ -6173,7 +6166,7 @@
             </a:r>
             <a:r>
               <a:rPr lang="en-US" dirty="0"/>
-              <a:t>: Fetching data from a server in the background and updating the page dynamically.</a:t>
+              <a:t>: Using JavaScript to fetch data from a server and display it on a page.</a:t>
             </a:r>
           </a:p>
         </p:txBody>
@@ -6181,7 +6174,7 @@
     </p:spTree>
     <p:extLst>
       <p:ext uri="{BB962C8B-B14F-4D97-AF65-F5344CB8AC3E}">
-        <p14:creationId xmlns:p14="http://schemas.microsoft.com/office/powerpoint/2010/main" val="3171761008"/>
+        <p14:creationId xmlns:p14="http://schemas.microsoft.com/office/powerpoint/2010/main" val="1567381203"/>
       </p:ext>
     </p:extLst>
   </p:cSld>
@@ -6213,7 +6206,7 @@
           <p:cNvPr id="2" name="Title 1">
             <a:extLst>
               <a:ext uri="{FF2B5EF4-FFF2-40B4-BE49-F238E27FC236}">
-                <a16:creationId xmlns:a16="http://schemas.microsoft.com/office/drawing/2014/main" id="{EF95A42E-A709-9C15-C719-CF406F4B939D}"/>
+                <a16:creationId xmlns:a16="http://schemas.microsoft.com/office/drawing/2014/main" id="{AD7F8279-AB35-1639-79D2-EEC66C1FEDE5}"/>
               </a:ext>
             </a:extLst>
           </p:cNvPr>
@@ -6231,7 +6224,7 @@
           <a:p>
             <a:r>
               <a:rPr lang="en-US" dirty="0"/>
-              <a:t>The Future of JavaScript</a:t>
+              <a:t>JavaScript and Modern Web Applications</a:t>
             </a:r>
           </a:p>
         </p:txBody>
@@ -6241,7 +6234,7 @@
           <p:cNvPr id="3" name="Content Placeholder 2">
             <a:extLst>
               <a:ext uri="{FF2B5EF4-FFF2-40B4-BE49-F238E27FC236}">
-                <a16:creationId xmlns:a16="http://schemas.microsoft.com/office/drawing/2014/main" id="{B7D4C553-F0E2-6A8A-A7C9-D5D64533DCA9}"/>
+                <a16:creationId xmlns:a16="http://schemas.microsoft.com/office/drawing/2014/main" id="{FFF3BEDB-2CFB-962E-56A0-D1DA75BD17C2}"/>
               </a:ext>
             </a:extLst>
           </p:cNvPr>
@@ -6259,39 +6252,31 @@
           <a:p>
             <a:r>
               <a:rPr lang="en-US" b="1" dirty="0"/>
-              <a:t>ES6 and Beyond</a:t>
-            </a:r>
-            <a:r>
-              <a:rPr lang="en-US" dirty="0"/>
-              <a:t>: New features like arrow functions, async/await, modules, and more.</a:t>
+              <a:t>Single Page Applications (SPA)</a:t>
+            </a:r>
+            <a:r>
+              <a:rPr lang="en-US" dirty="0"/>
+              <a:t>: JavaScript is heavily used in SPAs, where only part of the page updates, reducing load times.</a:t>
             </a:r>
           </a:p>
           <a:p>
             <a:r>
               <a:rPr lang="en-US" b="1" dirty="0"/>
-              <a:t>JavaScript in IoT</a:t>
-            </a:r>
-            <a:r>
-              <a:rPr lang="en-US" dirty="0"/>
-              <a:t>: With frameworks like </a:t>
-            </a:r>
+              <a:t>AJAX and Fetch API</a:t>
+            </a:r>
+            <a:r>
+              <a:rPr lang="en-US" dirty="0"/>
+              <a:t>: These allow JavaScript to make asynchronous HTTP requests without reloading the page.</a:t>
+            </a:r>
+          </a:p>
+          <a:p>
             <a:r>
               <a:rPr lang="en-US" b="1" dirty="0"/>
-              <a:t>Johnny-Five</a:t>
-            </a:r>
-            <a:r>
-              <a:rPr lang="en-US" dirty="0"/>
-              <a:t>, JavaScript can control physical devices (e.g., Arduino).</a:t>
-            </a:r>
-          </a:p>
-          <a:p>
-            <a:r>
-              <a:rPr lang="en-US" b="1" dirty="0" err="1"/>
-              <a:t>WebAssembly</a:t>
-            </a:r>
-            <a:r>
-              <a:rPr lang="en-US" dirty="0"/>
-              <a:t>: JavaScript will work alongside languages like C++ and Rust for high-performance applications.</a:t>
+              <a:t>Example</a:t>
+            </a:r>
+            <a:r>
+              <a:rPr lang="en-US" dirty="0"/>
+              <a:t>: Fetching data from a server in the background and updating the page dynamically.</a:t>
             </a:r>
           </a:p>
         </p:txBody>
@@ -6299,7 +6284,7 @@
     </p:spTree>
     <p:extLst>
       <p:ext uri="{BB962C8B-B14F-4D97-AF65-F5344CB8AC3E}">
-        <p14:creationId xmlns:p14="http://schemas.microsoft.com/office/powerpoint/2010/main" val="2409897225"/>
+        <p14:creationId xmlns:p14="http://schemas.microsoft.com/office/powerpoint/2010/main" val="3171761008"/>
       </p:ext>
     </p:extLst>
   </p:cSld>
@@ -6331,7 +6316,7 @@
           <p:cNvPr id="2" name="Title 1">
             <a:extLst>
               <a:ext uri="{FF2B5EF4-FFF2-40B4-BE49-F238E27FC236}">
-                <a16:creationId xmlns:a16="http://schemas.microsoft.com/office/drawing/2014/main" id="{B87B7222-40C8-7D77-C4AF-4065D05D4DF8}"/>
+                <a16:creationId xmlns:a16="http://schemas.microsoft.com/office/drawing/2014/main" id="{EF95A42E-A709-9C15-C719-CF406F4B939D}"/>
               </a:ext>
             </a:extLst>
           </p:cNvPr>
@@ -6349,7 +6334,7 @@
           <a:p>
             <a:r>
               <a:rPr lang="en-US" dirty="0"/>
-              <a:t>Summary and Key Takeaways</a:t>
+              <a:t>The Future of JavaScript</a:t>
             </a:r>
           </a:p>
         </p:txBody>
@@ -6359,7 +6344,7 @@
           <p:cNvPr id="3" name="Content Placeholder 2">
             <a:extLst>
               <a:ext uri="{FF2B5EF4-FFF2-40B4-BE49-F238E27FC236}">
-                <a16:creationId xmlns:a16="http://schemas.microsoft.com/office/drawing/2014/main" id="{68C653B1-A96B-B4C5-48E2-7667D2F92F2E}"/>
+                <a16:creationId xmlns:a16="http://schemas.microsoft.com/office/drawing/2014/main" id="{B7D4C553-F0E2-6A8A-A7C9-D5D64533DCA9}"/>
               </a:ext>
             </a:extLst>
           </p:cNvPr>
@@ -6376,20 +6361,40 @@
           <a:lstStyle/>
           <a:p>
             <a:r>
-              <a:rPr lang="en-US" dirty="0"/>
-              <a:t>JavaScript is an essential language for web development.</a:t>
-            </a:r>
-          </a:p>
-          <a:p>
-            <a:r>
-              <a:rPr lang="en-US" dirty="0"/>
-              <a:t>It allows for interactive, dynamic pages and can be used both on the client-side and the server-side.</a:t>
-            </a:r>
-          </a:p>
-          <a:p>
-            <a:r>
-              <a:rPr lang="en-US" dirty="0"/>
-              <a:t>JavaScript is constantly evolving, with ES6+ bringing modern features that make coding easier and more efficient.</a:t>
+              <a:rPr lang="en-US" b="1" dirty="0"/>
+              <a:t>ES6 and Beyond</a:t>
+            </a:r>
+            <a:r>
+              <a:rPr lang="en-US" dirty="0"/>
+              <a:t>: New features like arrow functions, async/await, modules, and more.</a:t>
+            </a:r>
+          </a:p>
+          <a:p>
+            <a:r>
+              <a:rPr lang="en-US" b="1" dirty="0"/>
+              <a:t>JavaScript in IoT</a:t>
+            </a:r>
+            <a:r>
+              <a:rPr lang="en-US" dirty="0"/>
+              <a:t>: With frameworks like </a:t>
+            </a:r>
+            <a:r>
+              <a:rPr lang="en-US" b="1" dirty="0"/>
+              <a:t>Johnny-Five</a:t>
+            </a:r>
+            <a:r>
+              <a:rPr lang="en-US" dirty="0"/>
+              <a:t>, JavaScript can control physical devices (e.g., Arduino).</a:t>
+            </a:r>
+          </a:p>
+          <a:p>
+            <a:r>
+              <a:rPr lang="en-US" b="1" dirty="0" err="1"/>
+              <a:t>WebAssembly</a:t>
+            </a:r>
+            <a:r>
+              <a:rPr lang="en-US" dirty="0"/>
+              <a:t>: JavaScript will work alongside languages like C++ and Rust for high-performance applications.</a:t>
             </a:r>
           </a:p>
         </p:txBody>
@@ -6397,7 +6402,7 @@
     </p:spTree>
     <p:extLst>
       <p:ext uri="{BB962C8B-B14F-4D97-AF65-F5344CB8AC3E}">
-        <p14:creationId xmlns:p14="http://schemas.microsoft.com/office/powerpoint/2010/main" val="969712268"/>
+        <p14:creationId xmlns:p14="http://schemas.microsoft.com/office/powerpoint/2010/main" val="2409897225"/>
       </p:ext>
     </p:extLst>
   </p:cSld>
@@ -6429,6 +6434,104 @@
           <p:cNvPr id="2" name="Title 1">
             <a:extLst>
               <a:ext uri="{FF2B5EF4-FFF2-40B4-BE49-F238E27FC236}">
+                <a16:creationId xmlns:a16="http://schemas.microsoft.com/office/drawing/2014/main" id="{B87B7222-40C8-7D77-C4AF-4065D05D4DF8}"/>
+              </a:ext>
+            </a:extLst>
+          </p:cNvPr>
+          <p:cNvSpPr>
+            <a:spLocks noGrp="1"/>
+          </p:cNvSpPr>
+          <p:nvPr>
+            <p:ph type="title"/>
+          </p:nvPr>
+        </p:nvSpPr>
+        <p:spPr/>
+        <p:txBody>
+          <a:bodyPr/>
+          <a:lstStyle/>
+          <a:p>
+            <a:r>
+              <a:rPr lang="en-US" dirty="0"/>
+              <a:t>Summary and Key Takeaways</a:t>
+            </a:r>
+          </a:p>
+        </p:txBody>
+      </p:sp>
+      <p:sp>
+        <p:nvSpPr>
+          <p:cNvPr id="3" name="Content Placeholder 2">
+            <a:extLst>
+              <a:ext uri="{FF2B5EF4-FFF2-40B4-BE49-F238E27FC236}">
+                <a16:creationId xmlns:a16="http://schemas.microsoft.com/office/drawing/2014/main" id="{68C653B1-A96B-B4C5-48E2-7667D2F92F2E}"/>
+              </a:ext>
+            </a:extLst>
+          </p:cNvPr>
+          <p:cNvSpPr>
+            <a:spLocks noGrp="1"/>
+          </p:cNvSpPr>
+          <p:nvPr>
+            <p:ph idx="1"/>
+          </p:nvPr>
+        </p:nvSpPr>
+        <p:spPr/>
+        <p:txBody>
+          <a:bodyPr/>
+          <a:lstStyle/>
+          <a:p>
+            <a:r>
+              <a:rPr lang="en-US" dirty="0"/>
+              <a:t>JavaScript is an essential language for web development.</a:t>
+            </a:r>
+          </a:p>
+          <a:p>
+            <a:r>
+              <a:rPr lang="en-US" dirty="0"/>
+              <a:t>It allows for interactive, dynamic pages and can be used both on the client-side and the server-side.</a:t>
+            </a:r>
+          </a:p>
+          <a:p>
+            <a:r>
+              <a:rPr lang="en-US" dirty="0"/>
+              <a:t>JavaScript is constantly evolving, with ES6+ bringing modern features that make coding easier and more efficient.</a:t>
+            </a:r>
+          </a:p>
+        </p:txBody>
+      </p:sp>
+    </p:spTree>
+    <p:extLst>
+      <p:ext uri="{BB962C8B-B14F-4D97-AF65-F5344CB8AC3E}">
+        <p14:creationId xmlns:p14="http://schemas.microsoft.com/office/powerpoint/2010/main" val="969712268"/>
+      </p:ext>
+    </p:extLst>
+  </p:cSld>
+  <p:clrMapOvr>
+    <a:masterClrMapping/>
+  </p:clrMapOvr>
+</p:sld>
+</file>
+
+<file path=ppt/slides/slide16.xml><?xml version="1.0" encoding="utf-8"?>
+<p:sld xmlns:a="http://schemas.openxmlformats.org/drawingml/2006/main" xmlns:r="http://schemas.openxmlformats.org/officeDocument/2006/relationships" xmlns:p="http://schemas.openxmlformats.org/presentationml/2006/main">
+  <p:cSld>
+    <p:spTree>
+      <p:nvGrpSpPr>
+        <p:cNvPr id="1" name=""/>
+        <p:cNvGrpSpPr/>
+        <p:nvPr/>
+      </p:nvGrpSpPr>
+      <p:grpSpPr>
+        <a:xfrm>
+          <a:off x="0" y="0"/>
+          <a:ext cx="0" cy="0"/>
+          <a:chOff x="0" y="0"/>
+          <a:chExt cx="0" cy="0"/>
+        </a:xfrm>
+      </p:grpSpPr>
+      <p:sp>
+        <p:nvSpPr>
+          <p:cNvPr id="2" name="Title 1">
+            <a:extLst>
+              <a:ext uri="{FF2B5EF4-FFF2-40B4-BE49-F238E27FC236}">
                 <a16:creationId xmlns:a16="http://schemas.microsoft.com/office/drawing/2014/main" id="{86C1E1D9-38FD-43D6-75CD-0730314188C8}"/>
               </a:ext>
             </a:extLst>
@@ -6505,7 +6608,7 @@
 </p:sld>
 </file>
 
-<file path=ppt/slides/slide16.xml><?xml version="1.0" encoding="utf-8"?>
+<file path=ppt/slides/slide17.xml><?xml version="1.0" encoding="utf-8"?>
 <p:sld xmlns:a="http://schemas.openxmlformats.org/drawingml/2006/main" xmlns:r="http://schemas.openxmlformats.org/officeDocument/2006/relationships" xmlns:p="http://schemas.openxmlformats.org/presentationml/2006/main">
   <p:cSld>
     <p:spTree>
@@ -7301,14 +7404,30 @@
           <a:lstStyle/>
           <a:p>
             <a:r>
-              <a:rPr lang="en-US" dirty="0"/>
-              <a:t>Runs in the Browser: JavaScript is executed by the browser’s JavaScript engine (e.g., V8 in Chrome).</a:t>
-            </a:r>
-          </a:p>
-          <a:p>
-            <a:r>
-              <a:rPr lang="en-US" dirty="0"/>
-              <a:t>DOM Manipulation: JavaScript interacts with the Document Object Model (DOM) to change the content of a web page.</a:t>
+              <a:rPr lang="en-US" b="1" dirty="0"/>
+              <a:t>Runs in the Browser</a:t>
+            </a:r>
+            <a:r>
+              <a:rPr lang="en-US" dirty="0"/>
+              <a:t>: JavaScript is executed by the browser’s JavaScript engine (e.g., V8 in Chrome).</a:t>
+            </a:r>
+          </a:p>
+          <a:p>
+            <a:r>
+              <a:rPr lang="en-US" b="1" dirty="0"/>
+              <a:t>DOM Manipulation</a:t>
+            </a:r>
+            <a:r>
+              <a:rPr lang="en-US" dirty="0"/>
+              <a:t>: JavaScript interacts with the </a:t>
+            </a:r>
+            <a:r>
+              <a:rPr lang="en-US" b="1" dirty="0"/>
+              <a:t>Document Object Model (DOM)</a:t>
+            </a:r>
+            <a:r>
+              <a:rPr lang="en-US" dirty="0"/>
+              <a:t> to change the content of a web page.</a:t>
             </a:r>
           </a:p>
           <a:p>
@@ -7493,8 +7612,12 @@
           </a:p>
           <a:p>
             <a:r>
-              <a:rPr lang="en-US" dirty="0"/>
-              <a:t>Comments: Use </a:t>
+              <a:rPr lang="en-US" b="1" dirty="0"/>
+              <a:t>Comments</a:t>
+            </a:r>
+            <a:r>
+              <a:rPr lang="en-US" dirty="0"/>
+              <a:t>: Use </a:t>
             </a:r>
             <a:r>
               <a:rPr lang="en-US" b="1" dirty="0">
@@ -7518,15 +7641,6 @@
               <a:rPr lang="en-US" dirty="0"/>
               <a:t> for multi-line comments.</a:t>
             </a:r>
-          </a:p>
-          <a:p>
-            <a:r>
-              <a:rPr lang="en-US" dirty="0"/>
-              <a:t>Example:</a:t>
-            </a:r>
-          </a:p>
-          <a:p>
-            <a:endParaRPr lang="en-US" dirty="0"/>
           </a:p>
         </p:txBody>
       </p:sp>
@@ -7578,6 +7692,215 @@
   <p:cSld>
     <p:spTree>
       <p:nvGrpSpPr>
+        <p:cNvPr id="1" name="">
+          <a:extLst>
+            <a:ext uri="{FF2B5EF4-FFF2-40B4-BE49-F238E27FC236}">
+              <a16:creationId xmlns:a16="http://schemas.microsoft.com/office/drawing/2014/main" id="{4268901A-C956-83A7-7D83-C03859297A82}"/>
+            </a:ext>
+          </a:extLst>
+        </p:cNvPr>
+        <p:cNvGrpSpPr/>
+        <p:nvPr/>
+      </p:nvGrpSpPr>
+      <p:grpSpPr>
+        <a:xfrm>
+          <a:off x="0" y="0"/>
+          <a:ext cx="0" cy="0"/>
+          <a:chOff x="0" y="0"/>
+          <a:chExt cx="0" cy="0"/>
+        </a:xfrm>
+      </p:grpSpPr>
+      <p:sp>
+        <p:nvSpPr>
+          <p:cNvPr id="2" name="Title 1">
+            <a:extLst>
+              <a:ext uri="{FF2B5EF4-FFF2-40B4-BE49-F238E27FC236}">
+                <a16:creationId xmlns:a16="http://schemas.microsoft.com/office/drawing/2014/main" id="{A90A07CA-E0E0-BCC2-F2EA-807C010D89CE}"/>
+              </a:ext>
+            </a:extLst>
+          </p:cNvPr>
+          <p:cNvSpPr>
+            <a:spLocks noGrp="1"/>
+          </p:cNvSpPr>
+          <p:nvPr>
+            <p:ph type="title"/>
+          </p:nvPr>
+        </p:nvSpPr>
+        <p:spPr/>
+        <p:txBody>
+          <a:bodyPr/>
+          <a:lstStyle/>
+          <a:p>
+            <a:r>
+              <a:rPr lang="en-US" dirty="0"/>
+              <a:t>JavaScript Syntax Overview (cont’d)</a:t>
+            </a:r>
+          </a:p>
+        </p:txBody>
+      </p:sp>
+      <p:sp>
+        <p:nvSpPr>
+          <p:cNvPr id="3" name="Content Placeholder 2">
+            <a:extLst>
+              <a:ext uri="{FF2B5EF4-FFF2-40B4-BE49-F238E27FC236}">
+                <a16:creationId xmlns:a16="http://schemas.microsoft.com/office/drawing/2014/main" id="{026B7055-DDE2-B97A-EB32-B5278EE5FB0E}"/>
+              </a:ext>
+            </a:extLst>
+          </p:cNvPr>
+          <p:cNvSpPr>
+            <a:spLocks noGrp="1"/>
+          </p:cNvSpPr>
+          <p:nvPr>
+            <p:ph idx="1"/>
+          </p:nvPr>
+        </p:nvSpPr>
+        <p:spPr/>
+        <p:txBody>
+          <a:bodyPr/>
+          <a:lstStyle/>
+          <a:p>
+            <a:r>
+              <a:rPr lang="en-US" b="1" dirty="0"/>
+              <a:t>Code Block</a:t>
+            </a:r>
+            <a:r>
+              <a:rPr lang="en-US" dirty="0"/>
+              <a:t>: A statement ends with a semicolon (</a:t>
+            </a:r>
+            <a:r>
+              <a:rPr lang="en-US" b="1" dirty="0"/>
+              <a:t>;</a:t>
+            </a:r>
+            <a:r>
+              <a:rPr lang="en-US" dirty="0"/>
+              <a:t>), but it’s often optional.</a:t>
+            </a:r>
+          </a:p>
+          <a:p>
+            <a:r>
+              <a:rPr lang="en-US" b="1" dirty="0"/>
+              <a:t>Variables</a:t>
+            </a:r>
+            <a:r>
+              <a:rPr lang="en-US" dirty="0"/>
+              <a:t>: Declared using </a:t>
+            </a:r>
+            <a:r>
+              <a:rPr lang="en-US" b="1" dirty="0">
+                <a:latin typeface="Courier New" panose="02070309020205020404" pitchFamily="49" charset="0"/>
+                <a:cs typeface="Courier New" panose="02070309020205020404" pitchFamily="49" charset="0"/>
+              </a:rPr>
+              <a:t>var</a:t>
+            </a:r>
+            <a:r>
+              <a:rPr lang="en-US" dirty="0"/>
+              <a:t>, </a:t>
+            </a:r>
+            <a:r>
+              <a:rPr lang="en-US" b="1" dirty="0">
+                <a:latin typeface="Courier New" panose="02070309020205020404" pitchFamily="49" charset="0"/>
+                <a:cs typeface="Courier New" panose="02070309020205020404" pitchFamily="49" charset="0"/>
+              </a:rPr>
+              <a:t>let</a:t>
+            </a:r>
+            <a:r>
+              <a:rPr lang="en-US" dirty="0"/>
+              <a:t>, or </a:t>
+            </a:r>
+            <a:r>
+              <a:rPr lang="en-US" b="1" dirty="0">
+                <a:latin typeface="Courier New" panose="02070309020205020404" pitchFamily="49" charset="0"/>
+                <a:cs typeface="Courier New" panose="02070309020205020404" pitchFamily="49" charset="0"/>
+              </a:rPr>
+              <a:t>const</a:t>
+            </a:r>
+            <a:r>
+              <a:rPr lang="en-US" dirty="0"/>
+              <a:t>.</a:t>
+            </a:r>
+          </a:p>
+          <a:p>
+            <a:r>
+              <a:rPr lang="en-US" b="1" dirty="0"/>
+              <a:t>Comments</a:t>
+            </a:r>
+            <a:r>
+              <a:rPr lang="en-US" dirty="0"/>
+              <a:t>: Use </a:t>
+            </a:r>
+            <a:r>
+              <a:rPr lang="en-US" b="1" dirty="0">
+                <a:latin typeface="Courier New" panose="02070309020205020404" pitchFamily="49" charset="0"/>
+                <a:cs typeface="Courier New" panose="02070309020205020404" pitchFamily="49" charset="0"/>
+              </a:rPr>
+              <a:t>//</a:t>
+            </a:r>
+            <a:r>
+              <a:rPr lang="en-US" dirty="0"/>
+              <a:t> for single-line comments and </a:t>
+            </a:r>
+            <a:r>
+              <a:rPr lang="en-US" b="1" dirty="0">
+                <a:latin typeface="Courier New" panose="02070309020205020404" pitchFamily="49" charset="0"/>
+                <a:cs typeface="Courier New" panose="02070309020205020404" pitchFamily="49" charset="0"/>
+              </a:rPr>
+              <a:t>/* … */</a:t>
+            </a:r>
+            <a:r>
+              <a:rPr lang="en-US" dirty="0"/>
+              <a:t> for multi-line comments.</a:t>
+            </a:r>
+          </a:p>
+        </p:txBody>
+      </p:sp>
+      <p:pic>
+        <p:nvPicPr>
+          <p:cNvPr id="5" name="Picture 4">
+            <a:extLst>
+              <a:ext uri="{FF2B5EF4-FFF2-40B4-BE49-F238E27FC236}">
+                <a16:creationId xmlns:a16="http://schemas.microsoft.com/office/drawing/2014/main" id="{D0C7EA63-8E61-C3F3-1C6E-E41AE29BFFE7}"/>
+              </a:ext>
+            </a:extLst>
+          </p:cNvPr>
+          <p:cNvPicPr>
+            <a:picLocks noChangeAspect="1"/>
+          </p:cNvPicPr>
+          <p:nvPr/>
+        </p:nvPicPr>
+        <p:blipFill>
+          <a:blip r:embed="rId2"/>
+          <a:stretch>
+            <a:fillRect/>
+          </a:stretch>
+        </p:blipFill>
+        <p:spPr>
+          <a:xfrm>
+            <a:off x="3600450" y="4560282"/>
+            <a:ext cx="4991100" cy="1206500"/>
+          </a:xfrm>
+          <a:prstGeom prst="rect">
+            <a:avLst/>
+          </a:prstGeom>
+        </p:spPr>
+      </p:pic>
+    </p:spTree>
+    <p:extLst>
+      <p:ext uri="{BB962C8B-B14F-4D97-AF65-F5344CB8AC3E}">
+        <p14:creationId xmlns:p14="http://schemas.microsoft.com/office/powerpoint/2010/main" val="1951793884"/>
+      </p:ext>
+    </p:extLst>
+  </p:cSld>
+  <p:clrMapOvr>
+    <a:masterClrMapping/>
+  </p:clrMapOvr>
+</p:sld>
+</file>
+
+<file path=ppt/slides/slide9.xml><?xml version="1.0" encoding="utf-8"?>
+<p:sld xmlns:a="http://schemas.openxmlformats.org/drawingml/2006/main" xmlns:r="http://schemas.openxmlformats.org/officeDocument/2006/relationships" xmlns:p="http://schemas.openxmlformats.org/presentationml/2006/main">
+  <p:cSld>
+    <p:spTree>
+      <p:nvGrpSpPr>
         <p:cNvPr id="1" name=""/>
         <p:cNvGrpSpPr/>
         <p:nvPr/>
@@ -7728,108 +8051,6 @@
     <p:extLst>
       <p:ext uri="{BB962C8B-B14F-4D97-AF65-F5344CB8AC3E}">
         <p14:creationId xmlns:p14="http://schemas.microsoft.com/office/powerpoint/2010/main" val="2563335420"/>
-      </p:ext>
-    </p:extLst>
-  </p:cSld>
-  <p:clrMapOvr>
-    <a:masterClrMapping/>
-  </p:clrMapOvr>
-</p:sld>
-</file>
-
-<file path=ppt/slides/slide9.xml><?xml version="1.0" encoding="utf-8"?>
-<p:sld xmlns:a="http://schemas.openxmlformats.org/drawingml/2006/main" xmlns:r="http://schemas.openxmlformats.org/officeDocument/2006/relationships" xmlns:p="http://schemas.openxmlformats.org/presentationml/2006/main">
-  <p:cSld>
-    <p:spTree>
-      <p:nvGrpSpPr>
-        <p:cNvPr id="1" name=""/>
-        <p:cNvGrpSpPr/>
-        <p:nvPr/>
-      </p:nvGrpSpPr>
-      <p:grpSpPr>
-        <a:xfrm>
-          <a:off x="0" y="0"/>
-          <a:ext cx="0" cy="0"/>
-          <a:chOff x="0" y="0"/>
-          <a:chExt cx="0" cy="0"/>
-        </a:xfrm>
-      </p:grpSpPr>
-      <p:sp>
-        <p:nvSpPr>
-          <p:cNvPr id="2" name="Title 1">
-            <a:extLst>
-              <a:ext uri="{FF2B5EF4-FFF2-40B4-BE49-F238E27FC236}">
-                <a16:creationId xmlns:a16="http://schemas.microsoft.com/office/drawing/2014/main" id="{8DE2A64F-B95B-35A9-6FB5-996E77138588}"/>
-              </a:ext>
-            </a:extLst>
-          </p:cNvPr>
-          <p:cNvSpPr>
-            <a:spLocks noGrp="1"/>
-          </p:cNvSpPr>
-          <p:nvPr>
-            <p:ph type="title"/>
-          </p:nvPr>
-        </p:nvSpPr>
-        <p:spPr/>
-        <p:txBody>
-          <a:bodyPr>
-            <a:normAutofit/>
-          </a:bodyPr>
-          <a:lstStyle/>
-          <a:p>
-            <a:r>
-              <a:rPr lang="en-US" dirty="0"/>
-              <a:t>JavaScript vs. Other Languages</a:t>
-            </a:r>
-          </a:p>
-        </p:txBody>
-      </p:sp>
-      <p:sp>
-        <p:nvSpPr>
-          <p:cNvPr id="7" name="Content Placeholder 6">
-            <a:extLst>
-              <a:ext uri="{FF2B5EF4-FFF2-40B4-BE49-F238E27FC236}">
-                <a16:creationId xmlns:a16="http://schemas.microsoft.com/office/drawing/2014/main" id="{60C2521E-3770-1756-E360-5244B434600E}"/>
-              </a:ext>
-            </a:extLst>
-          </p:cNvPr>
-          <p:cNvSpPr>
-            <a:spLocks noGrp="1"/>
-          </p:cNvSpPr>
-          <p:nvPr>
-            <p:ph idx="1"/>
-          </p:nvPr>
-        </p:nvSpPr>
-        <p:spPr/>
-        <p:txBody>
-          <a:bodyPr/>
-          <a:lstStyle/>
-          <a:p>
-            <a:r>
-              <a:rPr lang="en-US" b="1" dirty="0"/>
-              <a:t>Dynamic vs. Static Typing</a:t>
-            </a:r>
-            <a:r>
-              <a:rPr lang="en-US" dirty="0"/>
-              <a:t>: JavaScript is dynamically typed, unlike languages like Java which are statically typed.</a:t>
-            </a:r>
-          </a:p>
-          <a:p>
-            <a:r>
-              <a:rPr lang="en-US" b="1" dirty="0"/>
-              <a:t>Interpreted vs. Compiled</a:t>
-            </a:r>
-            <a:r>
-              <a:rPr lang="en-US" dirty="0"/>
-              <a:t>: JavaScript is interpreted, whereas languages like C++ are compiled.</a:t>
-            </a:r>
-          </a:p>
-        </p:txBody>
-      </p:sp>
-    </p:spTree>
-    <p:extLst>
-      <p:ext uri="{BB962C8B-B14F-4D97-AF65-F5344CB8AC3E}">
-        <p14:creationId xmlns:p14="http://schemas.microsoft.com/office/powerpoint/2010/main" val="3067465073"/>
       </p:ext>
     </p:extLst>
   </p:cSld>
